--- a/Presentación_bbdd.pptx
+++ b/Presentación_bbdd.pptx
@@ -205,7 +205,7 @@
           <a:p>
             <a:fld id="{5D4985EB-AB48-4D4C-A791-01344C058292}" type="datetimeFigureOut">
               <a:rPr lang="es-ES" smtClean="0"/>
-              <a:t>21/05/2026</a:t>
+              <a:t>22/05/2026</a:t>
             </a:fld>
             <a:endParaRPr lang="es-ES"/>
           </a:p>
@@ -1129,7 +1129,7 @@
           <a:p>
             <a:fld id="{37FF4EAB-D0E2-4CCE-8838-28DFB1DF7E9F}" type="datetimeFigureOut">
               <a:rPr lang="es-ES" smtClean="0"/>
-              <a:t>21/05/2026</a:t>
+              <a:t>22/05/2026</a:t>
             </a:fld>
             <a:endParaRPr lang="es-ES"/>
           </a:p>
@@ -1565,7 +1565,7 @@
           <a:p>
             <a:fld id="{37FF4EAB-D0E2-4CCE-8838-28DFB1DF7E9F}" type="datetimeFigureOut">
               <a:rPr lang="es-ES" smtClean="0"/>
-              <a:t>21/05/2026</a:t>
+              <a:t>22/05/2026</a:t>
             </a:fld>
             <a:endParaRPr lang="es-ES"/>
           </a:p>
@@ -1815,7 +1815,7 @@
           <a:p>
             <a:fld id="{37FF4EAB-D0E2-4CCE-8838-28DFB1DF7E9F}" type="datetimeFigureOut">
               <a:rPr lang="es-ES" smtClean="0"/>
-              <a:t>21/05/2026</a:t>
+              <a:t>22/05/2026</a:t>
             </a:fld>
             <a:endParaRPr lang="es-ES"/>
           </a:p>
@@ -2123,7 +2123,7 @@
           <a:p>
             <a:fld id="{37FF4EAB-D0E2-4CCE-8838-28DFB1DF7E9F}" type="datetimeFigureOut">
               <a:rPr lang="es-ES" smtClean="0"/>
-              <a:t>21/05/2026</a:t>
+              <a:t>22/05/2026</a:t>
             </a:fld>
             <a:endParaRPr lang="es-ES"/>
           </a:p>
@@ -2441,7 +2441,7 @@
           <a:p>
             <a:fld id="{37FF4EAB-D0E2-4CCE-8838-28DFB1DF7E9F}" type="datetimeFigureOut">
               <a:rPr lang="es-ES" smtClean="0"/>
-              <a:t>21/05/2026</a:t>
+              <a:t>22/05/2026</a:t>
             </a:fld>
             <a:endParaRPr lang="es-ES"/>
           </a:p>
@@ -2743,7 +2743,7 @@
           <a:p>
             <a:fld id="{37FF4EAB-D0E2-4CCE-8838-28DFB1DF7E9F}" type="datetimeFigureOut">
               <a:rPr lang="es-ES" smtClean="0"/>
-              <a:t>21/05/2026</a:t>
+              <a:t>22/05/2026</a:t>
             </a:fld>
             <a:endParaRPr lang="es-ES"/>
           </a:p>
@@ -3110,7 +3110,7 @@
           <a:p>
             <a:fld id="{37FF4EAB-D0E2-4CCE-8838-28DFB1DF7E9F}" type="datetimeFigureOut">
               <a:rPr lang="es-ES" smtClean="0"/>
-              <a:t>21/05/2026</a:t>
+              <a:t>22/05/2026</a:t>
             </a:fld>
             <a:endParaRPr lang="es-ES"/>
           </a:p>
@@ -3284,7 +3284,7 @@
           <a:p>
             <a:fld id="{37FF4EAB-D0E2-4CCE-8838-28DFB1DF7E9F}" type="datetimeFigureOut">
               <a:rPr lang="es-ES" smtClean="0"/>
-              <a:t>21/05/2026</a:t>
+              <a:t>22/05/2026</a:t>
             </a:fld>
             <a:endParaRPr lang="es-ES"/>
           </a:p>
@@ -3464,7 +3464,7 @@
           <a:p>
             <a:fld id="{37FF4EAB-D0E2-4CCE-8838-28DFB1DF7E9F}" type="datetimeFigureOut">
               <a:rPr lang="es-ES" smtClean="0"/>
-              <a:t>21/05/2026</a:t>
+              <a:t>22/05/2026</a:t>
             </a:fld>
             <a:endParaRPr lang="es-ES"/>
           </a:p>
@@ -3634,7 +3634,7 @@
           <a:p>
             <a:fld id="{37FF4EAB-D0E2-4CCE-8838-28DFB1DF7E9F}" type="datetimeFigureOut">
               <a:rPr lang="es-ES" smtClean="0"/>
-              <a:t>21/05/2026</a:t>
+              <a:t>22/05/2026</a:t>
             </a:fld>
             <a:endParaRPr lang="es-ES"/>
           </a:p>
@@ -3884,7 +3884,7 @@
           <a:p>
             <a:fld id="{37FF4EAB-D0E2-4CCE-8838-28DFB1DF7E9F}" type="datetimeFigureOut">
               <a:rPr lang="es-ES" smtClean="0"/>
-              <a:t>21/05/2026</a:t>
+              <a:t>22/05/2026</a:t>
             </a:fld>
             <a:endParaRPr lang="es-ES"/>
           </a:p>
@@ -4120,7 +4120,7 @@
           <a:p>
             <a:fld id="{37FF4EAB-D0E2-4CCE-8838-28DFB1DF7E9F}" type="datetimeFigureOut">
               <a:rPr lang="es-ES" smtClean="0"/>
-              <a:t>21/05/2026</a:t>
+              <a:t>22/05/2026</a:t>
             </a:fld>
             <a:endParaRPr lang="es-ES"/>
           </a:p>
@@ -4502,7 +4502,7 @@
           <a:p>
             <a:fld id="{37FF4EAB-D0E2-4CCE-8838-28DFB1DF7E9F}" type="datetimeFigureOut">
               <a:rPr lang="es-ES" smtClean="0"/>
-              <a:t>21/05/2026</a:t>
+              <a:t>22/05/2026</a:t>
             </a:fld>
             <a:endParaRPr lang="es-ES"/>
           </a:p>
@@ -4620,7 +4620,7 @@
           <a:p>
             <a:fld id="{37FF4EAB-D0E2-4CCE-8838-28DFB1DF7E9F}" type="datetimeFigureOut">
               <a:rPr lang="es-ES" smtClean="0"/>
-              <a:t>21/05/2026</a:t>
+              <a:t>22/05/2026</a:t>
             </a:fld>
             <a:endParaRPr lang="es-ES"/>
           </a:p>
@@ -4715,7 +4715,7 @@
           <a:p>
             <a:fld id="{37FF4EAB-D0E2-4CCE-8838-28DFB1DF7E9F}" type="datetimeFigureOut">
               <a:rPr lang="es-ES" smtClean="0"/>
-              <a:t>21/05/2026</a:t>
+              <a:t>22/05/2026</a:t>
             </a:fld>
             <a:endParaRPr lang="es-ES"/>
           </a:p>
@@ -4970,7 +4970,7 @@
           <a:p>
             <a:fld id="{37FF4EAB-D0E2-4CCE-8838-28DFB1DF7E9F}" type="datetimeFigureOut">
               <a:rPr lang="es-ES" smtClean="0"/>
-              <a:t>21/05/2026</a:t>
+              <a:t>22/05/2026</a:t>
             </a:fld>
             <a:endParaRPr lang="es-ES"/>
           </a:p>
@@ -5253,7 +5253,7 @@
           <a:p>
             <a:fld id="{37FF4EAB-D0E2-4CCE-8838-28DFB1DF7E9F}" type="datetimeFigureOut">
               <a:rPr lang="es-ES" smtClean="0"/>
-              <a:t>21/05/2026</a:t>
+              <a:t>22/05/2026</a:t>
             </a:fld>
             <a:endParaRPr lang="es-ES"/>
           </a:p>
@@ -5659,7 +5659,7 @@
           <a:p>
             <a:fld id="{37FF4EAB-D0E2-4CCE-8838-28DFB1DF7E9F}" type="datetimeFigureOut">
               <a:rPr lang="es-ES" smtClean="0"/>
-              <a:t>21/05/2026</a:t>
+              <a:t>22/05/2026</a:t>
             </a:fld>
             <a:endParaRPr lang="es-ES"/>
           </a:p>
@@ -7100,12 +7100,12 @@
           <a:lstStyle/>
           <a:p>
             <a:r>
-              <a:rPr lang="es-ES" sz="2800" b="1" dirty="0" err="1"/>
-              <a:t>Create</a:t>
+              <a:rPr lang="es-ES" sz="2800" b="1"/>
+              <a:t>Alter </a:t>
             </a:r>
             <a:r>
               <a:rPr lang="es-ES" sz="2800" b="1" dirty="0"/>
-              <a:t> Table</a:t>
+              <a:t>Table</a:t>
             </a:r>
           </a:p>
         </p:txBody>
